--- a/session5/exam-strategy/q1/q1_exam_strategy.pptx
+++ b/session5/exam-strategy/q1/q1_exam_strategy.pptx
@@ -3187,8 +3187,8 @@
         </p:nvSpPr>
         <p:spPr>
           <a:xfrm>
-            <a:off x="274320" y="685800"/>
-            <a:ext cx="6400800" cy="1645920"/>
+            <a:off x="274320" y="640080"/>
+            <a:ext cx="6583680" cy="1280160"/>
           </a:xfrm>
           <a:prstGeom prst="rect">
             <a:avLst/>
@@ -3196,13 +3196,13 @@
           <a:noFill/>
         </p:spPr>
         <p:txBody>
-          <a:bodyPr wrap="square">
+          <a:bodyPr wrap="square" tIns="0" bIns="0">
             <a:spAutoFit/>
           </a:bodyPr>
           <a:lstStyle/>
           <a:p>
             <a:pPr>
-              <a:defRPr sz="1100">
+              <a:defRPr sz="900">
                 <a:solidFill>
                   <a:srgbClr val="FFFFFF"/>
                 </a:solidFill>
@@ -3223,8 +3223,8 @@
         </p:nvSpPr>
         <p:spPr>
           <a:xfrm>
-            <a:off x="365760" y="2377440"/>
-            <a:ext cx="274320" cy="274320"/>
+            <a:off x="274320" y="2057400"/>
+            <a:ext cx="201168" cy="201168"/>
           </a:xfrm>
           <a:prstGeom prst="ellipse">
             <a:avLst/>
@@ -3255,7 +3255,7 @@
           <a:lstStyle/>
           <a:p>
             <a:pPr algn="ctr">
-              <a:defRPr sz="900" b="1">
+              <a:defRPr sz="700" b="1">
                 <a:solidFill>
                   <a:srgbClr val="FFFFFF"/>
                 </a:solidFill>
@@ -3275,8 +3275,8 @@
         </p:nvSpPr>
         <p:spPr>
           <a:xfrm>
-            <a:off x="777240" y="2377440"/>
-            <a:ext cx="5943600" cy="411480"/>
+            <a:off x="548640" y="2011680"/>
+            <a:ext cx="6400800" cy="736092"/>
           </a:xfrm>
           <a:prstGeom prst="rect">
             <a:avLst/>
@@ -3284,13 +3284,13 @@
           <a:noFill/>
         </p:spPr>
         <p:txBody>
-          <a:bodyPr wrap="square">
+          <a:bodyPr wrap="square" tIns="25400" bIns="0" lIns="0">
             <a:spAutoFit/>
           </a:bodyPr>
           <a:lstStyle/>
           <a:p>
             <a:pPr>
-              <a:defRPr sz="1000">
+              <a:defRPr sz="800">
                 <a:solidFill>
                   <a:srgbClr val="CCCCCC"/>
                 </a:solidFill>
@@ -3298,7 +3298,7 @@
               </a:defRPr>
             </a:pPr>
             <a:r>
-              <a:t>Lambda functions can connect to Amazon EFS file systems. However, Amazon EFS file system changes cannot invoke Lambda fu</a:t>
+              <a:t>Lambda functions can connect to Amazon EFS file systems. However, Amazon EFS file system changes can</a:t>
             </a:r>
           </a:p>
         </p:txBody>
@@ -3311,8 +3311,8 @@
         </p:nvSpPr>
         <p:spPr>
           <a:xfrm>
-            <a:off x="365760" y="2834640"/>
-            <a:ext cx="274320" cy="274320"/>
+            <a:off x="274320" y="2811780"/>
+            <a:ext cx="201168" cy="201168"/>
           </a:xfrm>
           <a:prstGeom prst="ellipse">
             <a:avLst/>
@@ -3343,7 +3343,7 @@
           <a:lstStyle/>
           <a:p>
             <a:pPr algn="ctr">
-              <a:defRPr sz="900" b="1">
+              <a:defRPr sz="700" b="1">
                 <a:solidFill>
                   <a:srgbClr val="FFFFFF"/>
                 </a:solidFill>
@@ -3363,8 +3363,8 @@
         </p:nvSpPr>
         <p:spPr>
           <a:xfrm>
-            <a:off x="777240" y="2834640"/>
-            <a:ext cx="5943600" cy="411480"/>
+            <a:off x="548640" y="2766060"/>
+            <a:ext cx="6400800" cy="736092"/>
           </a:xfrm>
           <a:prstGeom prst="rect">
             <a:avLst/>
@@ -3372,13 +3372,13 @@
           <a:noFill/>
         </p:spPr>
         <p:txBody>
-          <a:bodyPr wrap="square">
+          <a:bodyPr wrap="square" tIns="25400" bIns="0" lIns="0">
             <a:spAutoFit/>
           </a:bodyPr>
           <a:lstStyle/>
           <a:p>
             <a:pPr>
-              <a:defRPr sz="1000">
+              <a:defRPr sz="800">
                 <a:solidFill>
                   <a:srgbClr val="CCCCCC"/>
                 </a:solidFill>
@@ -3386,7 +3386,7 @@
               </a:defRPr>
             </a:pPr>
             <a:r>
-              <a:t>Lambda functions can run on a schedule and connect to Amazon EFS file systems. However, a scheduled/polling process woul</a:t>
+              <a:t>Lambda functions can run on a schedule and connect to Amazon EFS file systems. However, a scheduled/</a:t>
             </a:r>
           </a:p>
         </p:txBody>
@@ -3399,8 +3399,8 @@
         </p:nvSpPr>
         <p:spPr>
           <a:xfrm>
-            <a:off x="365760" y="3291840"/>
-            <a:ext cx="274320" cy="274320"/>
+            <a:off x="274320" y="3566160"/>
+            <a:ext cx="201168" cy="201168"/>
           </a:xfrm>
           <a:prstGeom prst="ellipse">
             <a:avLst/>
@@ -3431,7 +3431,7 @@
           <a:lstStyle/>
           <a:p>
             <a:pPr algn="ctr">
-              <a:defRPr sz="900" b="1">
+              <a:defRPr sz="700" b="1">
                 <a:solidFill>
                   <a:srgbClr val="FFFFFF"/>
                 </a:solidFill>
@@ -3451,8 +3451,8 @@
         </p:nvSpPr>
         <p:spPr>
           <a:xfrm>
-            <a:off x="777240" y="3291840"/>
-            <a:ext cx="5943600" cy="411480"/>
+            <a:off x="548640" y="3520440"/>
+            <a:ext cx="6400800" cy="736092"/>
           </a:xfrm>
           <a:prstGeom prst="rect">
             <a:avLst/>
@@ -3460,13 +3460,13 @@
           <a:noFill/>
         </p:spPr>
         <p:txBody>
-          <a:bodyPr wrap="square">
+          <a:bodyPr wrap="square" tIns="25400" bIns="0" lIns="0">
             <a:spAutoFit/>
           </a:bodyPr>
           <a:lstStyle/>
           <a:p>
             <a:pPr>
-              <a:defRPr sz="1000">
+              <a:defRPr sz="800">
                 <a:solidFill>
                   <a:srgbClr val="CCCCCC"/>
                 </a:solidFill>
@@ -3474,7 +3474,7 @@
               </a:defRPr>
             </a:pPr>
             <a:r>
-              <a:t>Lambda functions can be invoked from S3 events and can read from S3 buckets. An event-based invocation would allow for t</a:t>
+              <a:t>Lambda functions can be invoked from S3 events and can read from S3 buckets. An event-based invocati</a:t>
             </a:r>
           </a:p>
         </p:txBody>
@@ -3487,8 +3487,8 @@
         </p:nvSpPr>
         <p:spPr>
           <a:xfrm>
-            <a:off x="365760" y="3749039"/>
-            <a:ext cx="274320" cy="274320"/>
+            <a:off x="274320" y="4320540"/>
+            <a:ext cx="201168" cy="201168"/>
           </a:xfrm>
           <a:prstGeom prst="ellipse">
             <a:avLst/>
@@ -3519,7 +3519,7 @@
           <a:lstStyle/>
           <a:p>
             <a:pPr algn="ctr">
-              <a:defRPr sz="900" b="1">
+              <a:defRPr sz="700" b="1">
                 <a:solidFill>
                   <a:srgbClr val="FFFFFF"/>
                 </a:solidFill>
@@ -3539,8 +3539,8 @@
         </p:nvSpPr>
         <p:spPr>
           <a:xfrm>
-            <a:off x="777240" y="3749039"/>
-            <a:ext cx="5943600" cy="411480"/>
+            <a:off x="548640" y="4274820"/>
+            <a:ext cx="6400800" cy="736092"/>
           </a:xfrm>
           <a:prstGeom prst="rect">
             <a:avLst/>
@@ -3548,13 +3548,13 @@
           <a:noFill/>
         </p:spPr>
         <p:txBody>
-          <a:bodyPr wrap="square">
+          <a:bodyPr wrap="square" tIns="25400" bIns="0" lIns="0">
             <a:spAutoFit/>
           </a:bodyPr>
           <a:lstStyle/>
           <a:p>
             <a:pPr>
-              <a:defRPr sz="1000">
+              <a:defRPr sz="800">
                 <a:solidFill>
                   <a:srgbClr val="CCCCCC"/>
                 </a:solidFill>
@@ -3562,7 +3562,7 @@
               </a:defRPr>
             </a:pPr>
             <a:r>
-              <a:t>Lambda functions can run on a schedule and read from S3 buckets. However, a scheduled/polling process would not process </a:t>
+              <a:t>Lambda functions can run on a schedule and read from S3 buckets. However, a scheduled/polling proces</a:t>
             </a:r>
           </a:p>
         </p:txBody>
@@ -3844,8 +3844,8 @@
         </p:blipFill>
         <p:spPr>
           <a:xfrm>
-            <a:off x="182880" y="914400"/>
-            <a:ext cx="5280660" cy="3840480"/>
+            <a:off x="182880" y="1781735"/>
+            <a:ext cx="5303520" cy="2105809"/>
           </a:xfrm>
           <a:prstGeom prst="rect">
             <a:avLst/>
@@ -3980,9 +3980,9 @@
           <a:p>
             <a:pPr>
               <a:spcAft>
-                <a:spcPts val="600"/>
+                <a:spcPts val="400"/>
               </a:spcAft>
-              <a:defRPr sz="900">
+              <a:defRPr sz="800">
                 <a:solidFill>
                   <a:srgbClr val="212121"/>
                 </a:solidFill>
@@ -3990,15 +3990,15 @@
               </a:defRPr>
             </a:pPr>
             <a:r>
-              <a:t>• Lambda functions can connect to Amazon EFS file systems.</a:t>
+              <a:t>• Lambda functions can connect to Amazon EFS file systems</a:t>
             </a:r>
           </a:p>
           <a:p>
             <a:pPr>
               <a:spcAft>
-                <a:spcPts val="600"/>
+                <a:spcPts val="400"/>
               </a:spcAft>
-              <a:defRPr sz="900">
+              <a:defRPr sz="800">
                 <a:solidFill>
                   <a:srgbClr val="212121"/>
                 </a:solidFill>
@@ -4006,7 +4006,7 @@
               </a:defRPr>
             </a:pPr>
             <a:r>
-              <a:t>• However, Amazon EFS file system changes cannot invoke Lambda functions.</a:t>
+              <a:t>• However, Amazon EFS file system changes cannot invoke Lambda functions</a:t>
             </a:r>
           </a:p>
         </p:txBody>
@@ -4185,8 +4185,8 @@
         </p:blipFill>
         <p:spPr>
           <a:xfrm>
-            <a:off x="182880" y="914400"/>
-            <a:ext cx="5280660" cy="3840480"/>
+            <a:off x="182880" y="975220"/>
+            <a:ext cx="5303520" cy="3718839"/>
           </a:xfrm>
           <a:prstGeom prst="rect">
             <a:avLst/>
@@ -4321,9 +4321,9 @@
           <a:p>
             <a:pPr>
               <a:spcAft>
-                <a:spcPts val="600"/>
+                <a:spcPts val="400"/>
               </a:spcAft>
-              <a:defRPr sz="900">
+              <a:defRPr sz="800">
                 <a:solidFill>
                   <a:srgbClr val="212121"/>
                 </a:solidFill>
@@ -4331,15 +4331,15 @@
               </a:defRPr>
             </a:pPr>
             <a:r>
-              <a:t>• Lambda functions can run on a schedule and connect to Amazon EFS file systems.</a:t>
+              <a:t>• Lambda functions can run on a schedule and connect to Amazon EFS file systems</a:t>
             </a:r>
           </a:p>
           <a:p>
             <a:pPr>
               <a:spcAft>
-                <a:spcPts val="600"/>
+                <a:spcPts val="400"/>
               </a:spcAft>
-              <a:defRPr sz="900">
+              <a:defRPr sz="800">
                 <a:solidFill>
                   <a:srgbClr val="212121"/>
                 </a:solidFill>
@@ -4347,7 +4347,7 @@
               </a:defRPr>
             </a:pPr>
             <a:r>
-              <a:t>• However, a scheduled/polling process would not process the files as soon as they arrive.</a:t>
+              <a:t>• However, a scheduled/polling process would not process the files as soon as they arrive</a:t>
             </a:r>
           </a:p>
         </p:txBody>
@@ -4526,8 +4526,8 @@
         </p:blipFill>
         <p:spPr>
           <a:xfrm>
-            <a:off x="182880" y="914400"/>
-            <a:ext cx="5280660" cy="3840480"/>
+            <a:off x="182880" y="1805115"/>
+            <a:ext cx="5303520" cy="2059048"/>
           </a:xfrm>
           <a:prstGeom prst="rect">
             <a:avLst/>
@@ -4662,9 +4662,9 @@
           <a:p>
             <a:pPr>
               <a:spcAft>
-                <a:spcPts val="600"/>
+                <a:spcPts val="400"/>
               </a:spcAft>
-              <a:defRPr sz="900">
+              <a:defRPr sz="800">
                 <a:solidFill>
                   <a:srgbClr val="212121"/>
                 </a:solidFill>
@@ -4672,15 +4672,15 @@
               </a:defRPr>
             </a:pPr>
             <a:r>
-              <a:t>• Lambda functions can be invoked from S3 events and can read from S3 buckets.</a:t>
+              <a:t>• Lambda functions can be invoked from S3 events and can read from S3 buckets</a:t>
             </a:r>
           </a:p>
           <a:p>
             <a:pPr>
               <a:spcAft>
-                <a:spcPts val="600"/>
+                <a:spcPts val="400"/>
               </a:spcAft>
-              <a:defRPr sz="900">
+              <a:defRPr sz="800">
                 <a:solidFill>
                   <a:srgbClr val="212121"/>
                 </a:solidFill>
@@ -4688,7 +4688,7 @@
               </a:defRPr>
             </a:pPr>
             <a:r>
-              <a:t>• An event-based invocation would allow for the S3 objects to be processed as soon as they arrive.</a:t>
+              <a:t>• An event-based invocation would allow for the S3 objects to be processed as soon as they arrive</a:t>
             </a:r>
           </a:p>
         </p:txBody>
@@ -4867,8 +4867,8 @@
         </p:blipFill>
         <p:spPr>
           <a:xfrm>
-            <a:off x="182880" y="914400"/>
-            <a:ext cx="5280660" cy="3840480"/>
+            <a:off x="182880" y="1007640"/>
+            <a:ext cx="5303520" cy="3653999"/>
           </a:xfrm>
           <a:prstGeom prst="rect">
             <a:avLst/>
@@ -5003,9 +5003,9 @@
           <a:p>
             <a:pPr>
               <a:spcAft>
-                <a:spcPts val="600"/>
+                <a:spcPts val="400"/>
               </a:spcAft>
-              <a:defRPr sz="900">
+              <a:defRPr sz="800">
                 <a:solidFill>
                   <a:srgbClr val="212121"/>
                 </a:solidFill>
@@ -5013,15 +5013,15 @@
               </a:defRPr>
             </a:pPr>
             <a:r>
-              <a:t>• Lambda functions can run on a schedule and read from S3 buckets.</a:t>
+              <a:t>• Lambda functions can run on a schedule and read from S3 buckets</a:t>
             </a:r>
           </a:p>
           <a:p>
             <a:pPr>
               <a:spcAft>
-                <a:spcPts val="600"/>
+                <a:spcPts val="400"/>
               </a:spcAft>
-              <a:defRPr sz="900">
+              <a:defRPr sz="800">
                 <a:solidFill>
                   <a:srgbClr val="212121"/>
                 </a:solidFill>
@@ -5029,7 +5029,7 @@
               </a:defRPr>
             </a:pPr>
             <a:r>
-              <a:t>• However, a scheduled/polling process would not process the S3 objects as soon as they arrive.</a:t>
+              <a:t>• However, a scheduled/polling process would not process the S3 objects as soon as they arrive</a:t>
             </a:r>
           </a:p>
         </p:txBody>

--- a/session5/exam-strategy/q1/q1_exam_strategy.pptx
+++ b/session5/exam-strategy/q1/q1_exam_strategy.pptx
@@ -3187,8 +3187,8 @@
         </p:nvSpPr>
         <p:spPr>
           <a:xfrm>
-            <a:off x="274320" y="640080"/>
-            <a:ext cx="6583680" cy="1280160"/>
+            <a:off x="274320" y="685800"/>
+            <a:ext cx="6400800" cy="1645920"/>
           </a:xfrm>
           <a:prstGeom prst="rect">
             <a:avLst/>
@@ -3196,13 +3196,13 @@
           <a:noFill/>
         </p:spPr>
         <p:txBody>
-          <a:bodyPr wrap="square" tIns="0" bIns="0">
+          <a:bodyPr wrap="square">
             <a:spAutoFit/>
           </a:bodyPr>
           <a:lstStyle/>
           <a:p>
             <a:pPr>
-              <a:defRPr sz="900">
+              <a:defRPr sz="1100">
                 <a:solidFill>
                   <a:srgbClr val="FFFFFF"/>
                 </a:solidFill>
@@ -3223,8 +3223,8 @@
         </p:nvSpPr>
         <p:spPr>
           <a:xfrm>
-            <a:off x="274320" y="2057400"/>
-            <a:ext cx="201168" cy="201168"/>
+            <a:off x="365760" y="2377440"/>
+            <a:ext cx="274320" cy="274320"/>
           </a:xfrm>
           <a:prstGeom prst="ellipse">
             <a:avLst/>
@@ -3255,7 +3255,7 @@
           <a:lstStyle/>
           <a:p>
             <a:pPr algn="ctr">
-              <a:defRPr sz="700" b="1">
+              <a:defRPr sz="900" b="1">
                 <a:solidFill>
                   <a:srgbClr val="FFFFFF"/>
                 </a:solidFill>
@@ -3275,8 +3275,8 @@
         </p:nvSpPr>
         <p:spPr>
           <a:xfrm>
-            <a:off x="548640" y="2011680"/>
-            <a:ext cx="6400800" cy="736092"/>
+            <a:off x="777240" y="2377440"/>
+            <a:ext cx="5943600" cy="411480"/>
           </a:xfrm>
           <a:prstGeom prst="rect">
             <a:avLst/>
@@ -3284,13 +3284,13 @@
           <a:noFill/>
         </p:spPr>
         <p:txBody>
-          <a:bodyPr wrap="square" tIns="25400" bIns="0" lIns="0">
+          <a:bodyPr wrap="square">
             <a:spAutoFit/>
           </a:bodyPr>
           <a:lstStyle/>
           <a:p>
             <a:pPr>
-              <a:defRPr sz="800">
+              <a:defRPr sz="1000">
                 <a:solidFill>
                   <a:srgbClr val="CCCCCC"/>
                 </a:solidFill>
@@ -3298,7 +3298,7 @@
               </a:defRPr>
             </a:pPr>
             <a:r>
-              <a:t>Lambda functions can connect to Amazon EFS file systems. However, Amazon EFS file system changes can</a:t>
+              <a:t>Lambda functions can connect to Amazon EFS file systems. However, Amazon EFS file system changes cannot invoke Lambda fu</a:t>
             </a:r>
           </a:p>
         </p:txBody>
@@ -3311,8 +3311,8 @@
         </p:nvSpPr>
         <p:spPr>
           <a:xfrm>
-            <a:off x="274320" y="2811780"/>
-            <a:ext cx="201168" cy="201168"/>
+            <a:off x="365760" y="2834640"/>
+            <a:ext cx="274320" cy="274320"/>
           </a:xfrm>
           <a:prstGeom prst="ellipse">
             <a:avLst/>
@@ -3343,7 +3343,7 @@
           <a:lstStyle/>
           <a:p>
             <a:pPr algn="ctr">
-              <a:defRPr sz="700" b="1">
+              <a:defRPr sz="900" b="1">
                 <a:solidFill>
                   <a:srgbClr val="FFFFFF"/>
                 </a:solidFill>
@@ -3363,8 +3363,8 @@
         </p:nvSpPr>
         <p:spPr>
           <a:xfrm>
-            <a:off x="548640" y="2766060"/>
-            <a:ext cx="6400800" cy="736092"/>
+            <a:off x="777240" y="2834640"/>
+            <a:ext cx="5943600" cy="411480"/>
           </a:xfrm>
           <a:prstGeom prst="rect">
             <a:avLst/>
@@ -3372,13 +3372,13 @@
           <a:noFill/>
         </p:spPr>
         <p:txBody>
-          <a:bodyPr wrap="square" tIns="25400" bIns="0" lIns="0">
+          <a:bodyPr wrap="square">
             <a:spAutoFit/>
           </a:bodyPr>
           <a:lstStyle/>
           <a:p>
             <a:pPr>
-              <a:defRPr sz="800">
+              <a:defRPr sz="1000">
                 <a:solidFill>
                   <a:srgbClr val="CCCCCC"/>
                 </a:solidFill>
@@ -3386,7 +3386,7 @@
               </a:defRPr>
             </a:pPr>
             <a:r>
-              <a:t>Lambda functions can run on a schedule and connect to Amazon EFS file systems. However, a scheduled/</a:t>
+              <a:t>Lambda functions can run on a schedule and connect to Amazon EFS file systems. However, a scheduled/polling process woul</a:t>
             </a:r>
           </a:p>
         </p:txBody>
@@ -3399,8 +3399,8 @@
         </p:nvSpPr>
         <p:spPr>
           <a:xfrm>
-            <a:off x="274320" y="3566160"/>
-            <a:ext cx="201168" cy="201168"/>
+            <a:off x="365760" y="3291840"/>
+            <a:ext cx="274320" cy="274320"/>
           </a:xfrm>
           <a:prstGeom prst="ellipse">
             <a:avLst/>
@@ -3431,7 +3431,7 @@
           <a:lstStyle/>
           <a:p>
             <a:pPr algn="ctr">
-              <a:defRPr sz="700" b="1">
+              <a:defRPr sz="900" b="1">
                 <a:solidFill>
                   <a:srgbClr val="FFFFFF"/>
                 </a:solidFill>
@@ -3451,8 +3451,8 @@
         </p:nvSpPr>
         <p:spPr>
           <a:xfrm>
-            <a:off x="548640" y="3520440"/>
-            <a:ext cx="6400800" cy="736092"/>
+            <a:off x="777240" y="3291840"/>
+            <a:ext cx="5943600" cy="411480"/>
           </a:xfrm>
           <a:prstGeom prst="rect">
             <a:avLst/>
@@ -3460,13 +3460,13 @@
           <a:noFill/>
         </p:spPr>
         <p:txBody>
-          <a:bodyPr wrap="square" tIns="25400" bIns="0" lIns="0">
+          <a:bodyPr wrap="square">
             <a:spAutoFit/>
           </a:bodyPr>
           <a:lstStyle/>
           <a:p>
             <a:pPr>
-              <a:defRPr sz="800">
+              <a:defRPr sz="1000">
                 <a:solidFill>
                   <a:srgbClr val="CCCCCC"/>
                 </a:solidFill>
@@ -3474,7 +3474,7 @@
               </a:defRPr>
             </a:pPr>
             <a:r>
-              <a:t>Lambda functions can be invoked from S3 events and can read from S3 buckets. An event-based invocati</a:t>
+              <a:t>Lambda functions can be invoked from S3 events and can read from S3 buckets. An event-based invocation would allow for t</a:t>
             </a:r>
           </a:p>
         </p:txBody>
@@ -3487,8 +3487,8 @@
         </p:nvSpPr>
         <p:spPr>
           <a:xfrm>
-            <a:off x="274320" y="4320540"/>
-            <a:ext cx="201168" cy="201168"/>
+            <a:off x="365760" y="3749039"/>
+            <a:ext cx="274320" cy="274320"/>
           </a:xfrm>
           <a:prstGeom prst="ellipse">
             <a:avLst/>
@@ -3519,7 +3519,7 @@
           <a:lstStyle/>
           <a:p>
             <a:pPr algn="ctr">
-              <a:defRPr sz="700" b="1">
+              <a:defRPr sz="900" b="1">
                 <a:solidFill>
                   <a:srgbClr val="FFFFFF"/>
                 </a:solidFill>
@@ -3539,8 +3539,8 @@
         </p:nvSpPr>
         <p:spPr>
           <a:xfrm>
-            <a:off x="548640" y="4274820"/>
-            <a:ext cx="6400800" cy="736092"/>
+            <a:off x="777240" y="3749039"/>
+            <a:ext cx="5943600" cy="411480"/>
           </a:xfrm>
           <a:prstGeom prst="rect">
             <a:avLst/>
@@ -3548,13 +3548,13 @@
           <a:noFill/>
         </p:spPr>
         <p:txBody>
-          <a:bodyPr wrap="square" tIns="25400" bIns="0" lIns="0">
+          <a:bodyPr wrap="square">
             <a:spAutoFit/>
           </a:bodyPr>
           <a:lstStyle/>
           <a:p>
             <a:pPr>
-              <a:defRPr sz="800">
+              <a:defRPr sz="1000">
                 <a:solidFill>
                   <a:srgbClr val="CCCCCC"/>
                 </a:solidFill>
@@ -3562,7 +3562,7 @@
               </a:defRPr>
             </a:pPr>
             <a:r>
-              <a:t>Lambda functions can run on a schedule and read from S3 buckets. However, a scheduled/polling proces</a:t>
+              <a:t>Lambda functions can run on a schedule and read from S3 buckets. However, a scheduled/polling process would not process </a:t>
             </a:r>
           </a:p>
         </p:txBody>
@@ -3844,8 +3844,8 @@
         </p:blipFill>
         <p:spPr>
           <a:xfrm>
-            <a:off x="182880" y="1781735"/>
-            <a:ext cx="5303520" cy="2105809"/>
+            <a:off x="182880" y="1886420"/>
+            <a:ext cx="5303520" cy="1896438"/>
           </a:xfrm>
           <a:prstGeom prst="rect">
             <a:avLst/>
@@ -3980,9 +3980,9 @@
           <a:p>
             <a:pPr>
               <a:spcAft>
-                <a:spcPts val="400"/>
+                <a:spcPts val="600"/>
               </a:spcAft>
-              <a:defRPr sz="800">
+              <a:defRPr sz="900">
                 <a:solidFill>
                   <a:srgbClr val="212121"/>
                 </a:solidFill>
@@ -3990,15 +3990,15 @@
               </a:defRPr>
             </a:pPr>
             <a:r>
-              <a:t>• Lambda functions can connect to Amazon EFS file systems</a:t>
+              <a:t>• Lambda functions can connect to Amazon EFS file systems.</a:t>
             </a:r>
           </a:p>
           <a:p>
             <a:pPr>
               <a:spcAft>
-                <a:spcPts val="400"/>
+                <a:spcPts val="600"/>
               </a:spcAft>
-              <a:defRPr sz="800">
+              <a:defRPr sz="900">
                 <a:solidFill>
                   <a:srgbClr val="212121"/>
                 </a:solidFill>
@@ -4006,7 +4006,7 @@
               </a:defRPr>
             </a:pPr>
             <a:r>
-              <a:t>• However, Amazon EFS file system changes cannot invoke Lambda functions</a:t>
+              <a:t>• However, Amazon EFS file system changes cannot invoke Lambda functions.</a:t>
             </a:r>
           </a:p>
         </p:txBody>
@@ -4185,8 +4185,8 @@
         </p:blipFill>
         <p:spPr>
           <a:xfrm>
-            <a:off x="182880" y="975220"/>
-            <a:ext cx="5303520" cy="3718839"/>
+            <a:off x="182880" y="1017001"/>
+            <a:ext cx="5303520" cy="3635276"/>
           </a:xfrm>
           <a:prstGeom prst="rect">
             <a:avLst/>
@@ -4321,9 +4321,9 @@
           <a:p>
             <a:pPr>
               <a:spcAft>
-                <a:spcPts val="400"/>
+                <a:spcPts val="600"/>
               </a:spcAft>
-              <a:defRPr sz="800">
+              <a:defRPr sz="900">
                 <a:solidFill>
                   <a:srgbClr val="212121"/>
                 </a:solidFill>
@@ -4331,15 +4331,15 @@
               </a:defRPr>
             </a:pPr>
             <a:r>
-              <a:t>• Lambda functions can run on a schedule and connect to Amazon EFS file systems</a:t>
+              <a:t>• Lambda functions can run on a schedule and connect to Amazon EFS file systems.</a:t>
             </a:r>
           </a:p>
           <a:p>
             <a:pPr>
               <a:spcAft>
-                <a:spcPts val="400"/>
+                <a:spcPts val="600"/>
               </a:spcAft>
-              <a:defRPr sz="800">
+              <a:defRPr sz="900">
                 <a:solidFill>
                   <a:srgbClr val="212121"/>
                 </a:solidFill>
@@ -4347,7 +4347,7 @@
               </a:defRPr>
             </a:pPr>
             <a:r>
-              <a:t>• However, a scheduled/polling process would not process the files as soon as they arrive</a:t>
+              <a:t>• However, a scheduled/polling process would not process the files as soon as they arrive.</a:t>
             </a:r>
           </a:p>
         </p:txBody>
@@ -4526,8 +4526,8 @@
         </p:blipFill>
         <p:spPr>
           <a:xfrm>
-            <a:off x="182880" y="1805115"/>
-            <a:ext cx="5303520" cy="2059048"/>
+            <a:off x="182880" y="1974993"/>
+            <a:ext cx="5303520" cy="1719292"/>
           </a:xfrm>
           <a:prstGeom prst="rect">
             <a:avLst/>
@@ -4662,9 +4662,9 @@
           <a:p>
             <a:pPr>
               <a:spcAft>
-                <a:spcPts val="400"/>
+                <a:spcPts val="600"/>
               </a:spcAft>
-              <a:defRPr sz="800">
+              <a:defRPr sz="900">
                 <a:solidFill>
                   <a:srgbClr val="212121"/>
                 </a:solidFill>
@@ -4672,15 +4672,15 @@
               </a:defRPr>
             </a:pPr>
             <a:r>
-              <a:t>• Lambda functions can be invoked from S3 events and can read from S3 buckets</a:t>
+              <a:t>• Lambda functions can be invoked from S3 events and can read from S3 buckets.</a:t>
             </a:r>
           </a:p>
           <a:p>
             <a:pPr>
               <a:spcAft>
-                <a:spcPts val="400"/>
+                <a:spcPts val="600"/>
               </a:spcAft>
-              <a:defRPr sz="800">
+              <a:defRPr sz="900">
                 <a:solidFill>
                   <a:srgbClr val="212121"/>
                 </a:solidFill>
@@ -4688,7 +4688,7 @@
               </a:defRPr>
             </a:pPr>
             <a:r>
-              <a:t>• An event-based invocation would allow for the S3 objects to be processed as soon as they arrive</a:t>
+              <a:t>• An event-based invocation would allow for the S3 objects to be processed as soon as they arrive.</a:t>
             </a:r>
           </a:p>
         </p:txBody>
@@ -4867,8 +4867,8 @@
         </p:blipFill>
         <p:spPr>
           <a:xfrm>
-            <a:off x="182880" y="1007640"/>
-            <a:ext cx="5303520" cy="3653999"/>
+            <a:off x="182880" y="1115470"/>
+            <a:ext cx="5303520" cy="3438338"/>
           </a:xfrm>
           <a:prstGeom prst="rect">
             <a:avLst/>
@@ -5003,9 +5003,9 @@
           <a:p>
             <a:pPr>
               <a:spcAft>
-                <a:spcPts val="400"/>
+                <a:spcPts val="600"/>
               </a:spcAft>
-              <a:defRPr sz="800">
+              <a:defRPr sz="900">
                 <a:solidFill>
                   <a:srgbClr val="212121"/>
                 </a:solidFill>
@@ -5013,15 +5013,15 @@
               </a:defRPr>
             </a:pPr>
             <a:r>
-              <a:t>• Lambda functions can run on a schedule and read from S3 buckets</a:t>
+              <a:t>• Lambda functions can run on a schedule and read from S3 buckets.</a:t>
             </a:r>
           </a:p>
           <a:p>
             <a:pPr>
               <a:spcAft>
-                <a:spcPts val="400"/>
+                <a:spcPts val="600"/>
               </a:spcAft>
-              <a:defRPr sz="800">
+              <a:defRPr sz="900">
                 <a:solidFill>
                   <a:srgbClr val="212121"/>
                 </a:solidFill>
@@ -5029,7 +5029,7 @@
               </a:defRPr>
             </a:pPr>
             <a:r>
-              <a:t>• However, a scheduled/polling process would not process the S3 objects as soon as they arrive</a:t>
+              <a:t>• However, a scheduled/polling process would not process the S3 objects as soon as they arrive.</a:t>
             </a:r>
           </a:p>
         </p:txBody>
